--- a/docs/proposals/O-YES_EMIS_Financial_Proposal.pptx
+++ b/docs/proposals/O-YES_EMIS_Financial_Proposal.pptx
@@ -3328,7 +3328,7 @@
                 <a:ea typeface="Calibri" pitchFamily="34" charset="-122"/>
                 <a:cs typeface="Calibri" pitchFamily="34" charset="-120"/>
               </a:rPr>
-              <a:t>ETB 360,000</a:t>
+              <a:t>ETB 350,000</a:t>
             </a:r>
             <a:endParaRPr lang="en-US" sz="2400" dirty="0"/>
           </a:p>
@@ -10574,7 +10574,7 @@
                 <a:ea typeface="Calibri" pitchFamily="34" charset="-122"/>
                 <a:cs typeface="Calibri" pitchFamily="34" charset="-120"/>
               </a:rPr>
-              <a:t>+ ETB 110,000</a:t>
+              <a:t>+ ETB 100,000</a:t>
             </a:r>
             <a:endParaRPr lang="en-US" sz="1800" dirty="0"/>
           </a:p>
@@ -10730,7 +10730,7 @@
                 <a:ea typeface="Calibri" pitchFamily="34" charset="-122"/>
                 <a:cs typeface="Calibri" pitchFamily="34" charset="-120"/>
               </a:rPr>
-              <a:t>Cumulative: ETB 360,000</a:t>
+              <a:t>Cumulative: ETB 350,000</a:t>
             </a:r>
             <a:endParaRPr lang="en-US" sz="1200" dirty="0"/>
           </a:p>
@@ -10820,7 +10820,7 @@
                 <a:ea typeface="Calibri" pitchFamily="34" charset="-122"/>
                 <a:cs typeface="Calibri" pitchFamily="34" charset="-120"/>
               </a:rPr>
-              <a:t>+ ETB 240,000</a:t>
+              <a:t>+ ETB 250,000</a:t>
             </a:r>
             <a:endParaRPr lang="en-US" sz="1800" dirty="0"/>
           </a:p>
@@ -12174,7 +12174,7 @@
                           <a:ea typeface="Calibri" pitchFamily="34" charset="-122"/>
                           <a:cs typeface="Calibri" pitchFamily="34" charset="-120"/>
                         </a:rPr>
-                        <a:t>108,000</a:t>
+                        <a:t>105,000</a:t>
                       </a:r>
                       <a:endParaRPr lang="en-US" sz="1300" dirty="0">
                         <a:latin typeface="Calibri" charset="0"/>
@@ -12501,7 +12501,7 @@
                           <a:ea typeface="Calibri" pitchFamily="34" charset="-122"/>
                           <a:cs typeface="Calibri" pitchFamily="34" charset="-120"/>
                         </a:rPr>
-                        <a:t>252,000</a:t>
+                        <a:t>245,000</a:t>
                       </a:r>
                       <a:endParaRPr lang="en-US" sz="1300" dirty="0">
                         <a:latin typeface="Calibri" charset="0"/>
@@ -12837,7 +12837,7 @@
                           <a:ea typeface="Calibri" pitchFamily="34" charset="-122"/>
                           <a:cs typeface="Calibri" pitchFamily="34" charset="-120"/>
                         </a:rPr>
-                        <a:t>360,000</a:t>
+                        <a:t>350,000</a:t>
                       </a:r>
                       <a:endParaRPr lang="en-US" sz="1300" dirty="0">
                         <a:latin typeface="Calibri" charset="0"/>
@@ -14161,7 +14161,7 @@
                 <a:ea typeface="Calibri" pitchFamily="34" charset="-122"/>
                 <a:cs typeface="Calibri" pitchFamily="34" charset="-120"/>
               </a:rPr>
-              <a:t>Deployment</a:t>
+              <a:t>Hosting &amp; domain</a:t>
             </a:r>
             <a:endParaRPr lang="en-US" sz="1400" dirty="0"/>
           </a:p>
@@ -14200,7 +14200,7 @@
                 <a:ea typeface="Calibri" pitchFamily="34" charset="-122"/>
                 <a:cs typeface="Calibri" pitchFamily="34" charset="-120"/>
               </a:rPr>
-              <a:t>Setup on O-YES's cloud or office server, domain and SSL configured</a:t>
+              <a:t>Included in the price: server hosting, domain and SSL, fully set up</a:t>
             </a:r>
             <a:endParaRPr lang="en-US" sz="1200" dirty="0"/>
           </a:p>
@@ -14690,7 +14690,7 @@
                 <a:ea typeface="Calibri" pitchFamily="34" charset="-122"/>
                 <a:cs typeface="Calibri" pitchFamily="34" charset="-120"/>
               </a:rPr>
-              <a:t>Hosting, domain and SMS fees — paid directly by O-YES to the provider</a:t>
+              <a:t>SMS fees, if SMS notifications are used</a:t>
             </a:r>
             <a:endParaRPr lang="en-US" sz="1200" dirty="0"/>
           </a:p>
